--- a/icons.pptx
+++ b/icons.pptx
@@ -270,7 +270,7 @@
           <a:p>
             <a:fld id="{B59F2BC5-72A1-3A4B-A101-2B3BFB75E50C}" type="datetimeFigureOut">
               <a:rPr kumimoji="1" lang="ja-JP" altLang="en-US" smtClean="0"/>
-              <a:t>2026/3/15</a:t>
+              <a:t>2026/6/14</a:t>
             </a:fld>
             <a:endParaRPr kumimoji="1" lang="ja-JP" altLang="en-US"/>
           </a:p>
@@ -500,7 +500,7 @@
           <a:p>
             <a:fld id="{B59F2BC5-72A1-3A4B-A101-2B3BFB75E50C}" type="datetimeFigureOut">
               <a:rPr kumimoji="1" lang="ja-JP" altLang="en-US" smtClean="0"/>
-              <a:t>2026/3/15</a:t>
+              <a:t>2026/6/14</a:t>
             </a:fld>
             <a:endParaRPr kumimoji="1" lang="ja-JP" altLang="en-US"/>
           </a:p>
@@ -740,7 +740,7 @@
           <a:p>
             <a:fld id="{B59F2BC5-72A1-3A4B-A101-2B3BFB75E50C}" type="datetimeFigureOut">
               <a:rPr kumimoji="1" lang="ja-JP" altLang="en-US" smtClean="0"/>
-              <a:t>2026/3/15</a:t>
+              <a:t>2026/6/14</a:t>
             </a:fld>
             <a:endParaRPr kumimoji="1" lang="ja-JP" altLang="en-US"/>
           </a:p>
@@ -970,7 +970,7 @@
           <a:p>
             <a:fld id="{B59F2BC5-72A1-3A4B-A101-2B3BFB75E50C}" type="datetimeFigureOut">
               <a:rPr kumimoji="1" lang="ja-JP" altLang="en-US" smtClean="0"/>
-              <a:t>2026/3/15</a:t>
+              <a:t>2026/6/14</a:t>
             </a:fld>
             <a:endParaRPr kumimoji="1" lang="ja-JP" altLang="en-US"/>
           </a:p>
@@ -1245,7 +1245,7 @@
           <a:p>
             <a:fld id="{B59F2BC5-72A1-3A4B-A101-2B3BFB75E50C}" type="datetimeFigureOut">
               <a:rPr kumimoji="1" lang="ja-JP" altLang="en-US" smtClean="0"/>
-              <a:t>2026/3/15</a:t>
+              <a:t>2026/6/14</a:t>
             </a:fld>
             <a:endParaRPr kumimoji="1" lang="ja-JP" altLang="en-US"/>
           </a:p>
@@ -1574,7 +1574,7 @@
           <a:p>
             <a:fld id="{B59F2BC5-72A1-3A4B-A101-2B3BFB75E50C}" type="datetimeFigureOut">
               <a:rPr kumimoji="1" lang="ja-JP" altLang="en-US" smtClean="0"/>
-              <a:t>2026/3/15</a:t>
+              <a:t>2026/6/14</a:t>
             </a:fld>
             <a:endParaRPr kumimoji="1" lang="ja-JP" altLang="en-US"/>
           </a:p>
@@ -2050,7 +2050,7 @@
           <a:p>
             <a:fld id="{B59F2BC5-72A1-3A4B-A101-2B3BFB75E50C}" type="datetimeFigureOut">
               <a:rPr kumimoji="1" lang="ja-JP" altLang="en-US" smtClean="0"/>
-              <a:t>2026/3/15</a:t>
+              <a:t>2026/6/14</a:t>
             </a:fld>
             <a:endParaRPr kumimoji="1" lang="ja-JP" altLang="en-US"/>
           </a:p>
@@ -2191,7 +2191,7 @@
           <a:p>
             <a:fld id="{B59F2BC5-72A1-3A4B-A101-2B3BFB75E50C}" type="datetimeFigureOut">
               <a:rPr kumimoji="1" lang="ja-JP" altLang="en-US" smtClean="0"/>
-              <a:t>2026/3/15</a:t>
+              <a:t>2026/6/14</a:t>
             </a:fld>
             <a:endParaRPr kumimoji="1" lang="ja-JP" altLang="en-US"/>
           </a:p>
@@ -2304,7 +2304,7 @@
           <a:p>
             <a:fld id="{B59F2BC5-72A1-3A4B-A101-2B3BFB75E50C}" type="datetimeFigureOut">
               <a:rPr kumimoji="1" lang="ja-JP" altLang="en-US" smtClean="0"/>
-              <a:t>2026/3/15</a:t>
+              <a:t>2026/6/14</a:t>
             </a:fld>
             <a:endParaRPr kumimoji="1" lang="ja-JP" altLang="en-US"/>
           </a:p>
@@ -2647,7 +2647,7 @@
           <a:p>
             <a:fld id="{B59F2BC5-72A1-3A4B-A101-2B3BFB75E50C}" type="datetimeFigureOut">
               <a:rPr kumimoji="1" lang="ja-JP" altLang="en-US" smtClean="0"/>
-              <a:t>2026/3/15</a:t>
+              <a:t>2026/6/14</a:t>
             </a:fld>
             <a:endParaRPr kumimoji="1" lang="ja-JP" altLang="en-US"/>
           </a:p>
@@ -2935,7 +2935,7 @@
           <a:p>
             <a:fld id="{B59F2BC5-72A1-3A4B-A101-2B3BFB75E50C}" type="datetimeFigureOut">
               <a:rPr kumimoji="1" lang="ja-JP" altLang="en-US" smtClean="0"/>
-              <a:t>2026/3/15</a:t>
+              <a:t>2026/6/14</a:t>
             </a:fld>
             <a:endParaRPr kumimoji="1" lang="ja-JP" altLang="en-US"/>
           </a:p>
@@ -3208,7 +3208,7 @@
           <a:p>
             <a:fld id="{B59F2BC5-72A1-3A4B-A101-2B3BFB75E50C}" type="datetimeFigureOut">
               <a:rPr kumimoji="1" lang="ja-JP" altLang="en-US" smtClean="0"/>
-              <a:t>2026/3/15</a:t>
+              <a:t>2026/6/14</a:t>
             </a:fld>
             <a:endParaRPr kumimoji="1" lang="ja-JP" altLang="en-US"/>
           </a:p>
@@ -3691,6 +3691,80 @@
               <a:solidFill>
                 <a:schemeClr val="bg2">
                   <a:lumMod val="50000"/>
+                </a:schemeClr>
+              </a:solidFill>
+              <a:latin typeface="Calibri" panose="020F0502020204030204" pitchFamily="34" charset="0"/>
+              <a:cs typeface="Calibri" panose="020F0502020204030204" pitchFamily="34" charset="0"/>
+            </a:endParaRPr>
+          </a:p>
+        </p:txBody>
+      </p:sp>
+      <p:sp>
+        <p:nvSpPr>
+          <p:cNvPr id="2" name="角丸四角形 1">
+            <a:extLst>
+              <a:ext uri="{FF2B5EF4-FFF2-40B4-BE49-F238E27FC236}">
+                <a16:creationId xmlns:a16="http://schemas.microsoft.com/office/drawing/2014/main" id="{DC2BEFA7-3045-0286-8A10-D90C933E2D04}"/>
+              </a:ext>
+            </a:extLst>
+          </p:cNvPr>
+          <p:cNvSpPr/>
+          <p:nvPr/>
+        </p:nvSpPr>
+        <p:spPr>
+          <a:xfrm>
+            <a:off x="3109787" y="5203693"/>
+            <a:ext cx="819510" cy="327804"/>
+          </a:xfrm>
+          <a:prstGeom prst="roundRect">
+            <a:avLst/>
+          </a:prstGeom>
+          <a:noFill/>
+          <a:ln w="38100">
+            <a:solidFill>
+              <a:schemeClr val="accent2">
+                <a:lumMod val="75000"/>
+              </a:schemeClr>
+            </a:solidFill>
+          </a:ln>
+        </p:spPr>
+        <p:style>
+          <a:lnRef idx="2">
+            <a:schemeClr val="accent1">
+              <a:shade val="15000"/>
+            </a:schemeClr>
+          </a:lnRef>
+          <a:fillRef idx="1">
+            <a:schemeClr val="accent1"/>
+          </a:fillRef>
+          <a:effectRef idx="0">
+            <a:schemeClr val="accent1"/>
+          </a:effectRef>
+          <a:fontRef idx="minor">
+            <a:schemeClr val="lt1"/>
+          </a:fontRef>
+        </p:style>
+        <p:txBody>
+          <a:bodyPr rtlCol="0" anchor="ctr"/>
+          <a:lstStyle/>
+          <a:p>
+            <a:pPr algn="ctr"/>
+            <a:r>
+              <a:rPr kumimoji="1" lang="en-US" altLang="ja-JP" b="1" dirty="0">
+                <a:solidFill>
+                  <a:schemeClr val="accent2">
+                    <a:lumMod val="75000"/>
+                  </a:schemeClr>
+                </a:solidFill>
+                <a:latin typeface="Calibri" panose="020F0502020204030204" pitchFamily="34" charset="0"/>
+                <a:cs typeface="Calibri" panose="020F0502020204030204" pitchFamily="34" charset="0"/>
+              </a:rPr>
+              <a:t>Slide</a:t>
+            </a:r>
+            <a:endParaRPr kumimoji="1" lang="ja-JP" altLang="en-US" b="1">
+              <a:solidFill>
+                <a:schemeClr val="accent2">
+                  <a:lumMod val="75000"/>
                 </a:schemeClr>
               </a:solidFill>
               <a:latin typeface="Calibri" panose="020F0502020204030204" pitchFamily="34" charset="0"/>
